--- a/presentation/api-patterns-grpc-quarkus/api-patterns-grpc-quarkus-r1.1.pptx
+++ b/presentation/api-patterns-grpc-quarkus/api-patterns-grpc-quarkus-r1.1.pptx
@@ -71,9 +71,10 @@
     <p:sldId id="319" r:id="rId65"/>
     <p:sldId id="320" r:id="rId66"/>
     <p:sldId id="321" r:id="rId67"/>
+    <p:sldId id="322" r:id="rId68"/>
   </p:sldIdLst>
   <p:notesMasterIdLst>
-    <p:notesMasterId r:id="rId68"/>
+    <p:notesMasterId r:id="rId69"/>
   </p:notesMasterIdLst>
   <p:sldSz cx="12192000" cy="6858000"/>
   <p:notesSz cx="6858000" cy="12192000"/>
@@ -6047,6 +6048,94 @@
             <a:fld id="{F7021451-1387-4CA6-816F-3879F97B5CBC}" type="slidenum">
               <a:rPr lang="en-US"/>
               <a:t>66</a:t>
+            </a:fld>
+            <a:endParaRPr lang="en-US"/>
+          </a:p>
+        </p:txBody>
+      </p:sp>
+    </p:spTree>
+    <p:extLst>
+      <p:ext uri="{BB962C8B-B14F-4D97-AF65-F5344CB8AC3E}">
+        <p14:creationId xmlns:p14="http://schemas.microsoft.com/office/powerpoint/2010/main" val="1024086991"/>
+      </p:ext>
+    </p:extLst>
+  </p:cSld>
+  <p:clrMapOvr>
+    <a:masterClrMapping/>
+  </p:clrMapOvr>
+</p:notes>
+</file>
+
+<file path=ppt/notesSlides/notesSlide67.xml><?xml version="1.0" encoding="utf-8"?>
+<p:notes xmlns:a="http://schemas.openxmlformats.org/drawingml/2006/main" xmlns:r="http://schemas.openxmlformats.org/officeDocument/2006/relationships" xmlns:p="http://schemas.openxmlformats.org/presentationml/2006/main">
+  <p:cSld>
+    <p:spTree>
+      <p:nvGrpSpPr>
+        <p:cNvPr id="1" name=""/>
+        <p:cNvGrpSpPr/>
+        <p:nvPr/>
+      </p:nvGrpSpPr>
+      <p:grpSpPr>
+        <a:xfrm>
+          <a:off x="0" y="0"/>
+          <a:ext cx="0" cy="0"/>
+          <a:chOff x="0" y="0"/>
+          <a:chExt cx="0" cy="0"/>
+        </a:xfrm>
+      </p:grpSpPr>
+      <p:sp>
+        <p:nvSpPr>
+          <p:cNvPr id="2" name="Slide Image Placeholder 1"/>
+          <p:cNvSpPr>
+            <a:spLocks noGrp="1" noRot="1" noChangeAspect="1"/>
+          </p:cNvSpPr>
+          <p:nvPr>
+            <p:ph type="sldImg"/>
+          </p:nvPr>
+        </p:nvSpPr>
+        <p:spPr/>
+      </p:sp>
+      <p:sp>
+        <p:nvSpPr>
+          <p:cNvPr id="3" name="Notes Placeholder 2"/>
+          <p:cNvSpPr>
+            <a:spLocks noGrp="1"/>
+          </p:cNvSpPr>
+          <p:nvPr>
+            <p:ph type="body" idx="1"/>
+          </p:nvPr>
+        </p:nvSpPr>
+        <p:spPr/>
+        <p:txBody>
+          <a:bodyPr/>
+          <a:lstStyle/>
+          <a:p>
+            <a:r>
+              <a:rPr lang="en-US" dirty="0"/>
+              <a:t>This is the Quarkus implementation deck, so the left code takes you to the runnable Quarkus example and contract, the right to the whole series. On the left, the site: the chapters, the Protobuf contracts, and the runnable both-stack examples, all public. On the right, the Workshops and Tutorials hub: every workshop, tutorial, and deck in the series in one place, including the REST, GraphQL, and WebSockets siblings. Scan whichever is useful; both are on the Pattern Catalyst GitHub organization.</a:t>
+            </a:r>
+            <a:endParaRPr lang="en-US" dirty="0"/>
+          </a:p>
+        </p:txBody>
+      </p:sp>
+      <p:sp>
+        <p:nvSpPr>
+          <p:cNvPr id="4" name="Slide Number Placeholder 3"/>
+          <p:cNvSpPr>
+            <a:spLocks noGrp="1"/>
+          </p:cNvSpPr>
+          <p:nvPr>
+            <p:ph type="sldNum" sz="quarter" idx="10"/>
+          </p:nvPr>
+        </p:nvSpPr>
+        <p:spPr/>
+        <p:txBody>
+          <a:bodyPr/>
+          <a:lstStyle/>
+          <a:p>
+            <a:fld id="{F7021451-1387-4CA6-816F-3879F97B5CBC}" type="slidenum">
+              <a:rPr lang="en-US"/>
+              <a:t>67</a:t>
             </a:fld>
             <a:endParaRPr lang="en-US"/>
           </a:p>
@@ -6662,7 +6751,7 @@
       </p:grpSpPr>
       <p:pic>
         <p:nvPicPr>
-          <p:cNvPr id="2" name="Image 0" descr="/home/rsedor/Dev/api-patterns-and-practices-grpc/presentation/_shared/assets/cover-panel.png">    </p:cNvPr>
+          <p:cNvPr id="2" name="Image 0" descr="/tmp/pcwork/api-patterns-and-practices-grpc/presentation/_shared/assets/cover-panel.png">    </p:cNvPr>
           <p:cNvPicPr>
             <a:picLocks noChangeAspect="1"/>
           </p:cNvPicPr>
@@ -6915,7 +7004,7 @@
       </p:sp>
       <p:pic>
         <p:nvPicPr>
-          <p:cNvPr id="8" name="Image 1" descr="/home/rsedor/Dev/api-patterns-and-practices-grpc/presentation/_shared/assets/logo-candidate-2.png">    </p:cNvPr>
+          <p:cNvPr id="8" name="Image 1" descr="/tmp/pcwork/api-patterns-and-practices-grpc/presentation/_shared/assets/logo-candidate-2.png">    </p:cNvPr>
           <p:cNvPicPr>
             <a:picLocks noChangeAspect="1"/>
           </p:cNvPicPr>
@@ -7003,7 +7092,7 @@
       </p:sp>
       <p:pic>
         <p:nvPicPr>
-          <p:cNvPr id="3" name="Image 0" descr="/home/rsedor/Dev/api-patterns-and-practices-grpc/presentation/_shared/assets/logo-candidate-2.png">    </p:cNvPr>
+          <p:cNvPr id="3" name="Image 0" descr="/tmp/pcwork/api-patterns-and-practices-grpc/presentation/_shared/assets/logo-candidate-2.png">    </p:cNvPr>
           <p:cNvPicPr>
             <a:picLocks noChangeAspect="1"/>
           </p:cNvPicPr>
@@ -7643,7 +7732,7 @@
       </p:grpSpPr>
       <p:pic>
         <p:nvPicPr>
-          <p:cNvPr id="2" name="Image 0" descr="/home/rsedor/Dev/api-patterns-and-practices-grpc/presentation/_shared/assets/section-panel.png">    </p:cNvPr>
+          <p:cNvPr id="2" name="Image 0" descr="/tmp/pcwork/api-patterns-and-practices-grpc/presentation/_shared/assets/section-panel.png">    </p:cNvPr>
           <p:cNvPicPr>
             <a:picLocks noChangeAspect="1"/>
           </p:cNvPicPr>
@@ -7784,7 +7873,7 @@
       </p:sp>
       <p:pic>
         <p:nvPicPr>
-          <p:cNvPr id="6" name="Image 1" descr="/home/rsedor/Dev/api-patterns-and-practices-grpc/presentation/_shared/assets/redhat-logo-white.png">    </p:cNvPr>
+          <p:cNvPr id="6" name="Image 1" descr="/tmp/pcwork/api-patterns-and-practices-grpc/presentation/_shared/assets/redhat-logo-white.png">    </p:cNvPr>
           <p:cNvPicPr>
             <a:picLocks noChangeAspect="1"/>
           </p:cNvPicPr>
@@ -7872,7 +7961,7 @@
       </p:sp>
       <p:pic>
         <p:nvPicPr>
-          <p:cNvPr id="3" name="Image 0" descr="/home/rsedor/Dev/api-patterns-and-practices-grpc/presentation/_shared/assets/logo-candidate-2.png">    </p:cNvPr>
+          <p:cNvPr id="3" name="Image 0" descr="/tmp/pcwork/api-patterns-and-practices-grpc/presentation/_shared/assets/logo-candidate-2.png">    </p:cNvPr>
           <p:cNvPicPr>
             <a:picLocks noChangeAspect="1"/>
           </p:cNvPicPr>
@@ -8530,7 +8619,7 @@
       </p:grpSpPr>
       <p:pic>
         <p:nvPicPr>
-          <p:cNvPr id="2" name="Image 0" descr="/home/rsedor/Dev/api-patterns-and-practices-grpc/presentation/_shared/assets/section-panel.png">    </p:cNvPr>
+          <p:cNvPr id="2" name="Image 0" descr="/tmp/pcwork/api-patterns-and-practices-grpc/presentation/_shared/assets/section-panel.png">    </p:cNvPr>
           <p:cNvPicPr>
             <a:picLocks noChangeAspect="1"/>
           </p:cNvPicPr>
@@ -8671,7 +8760,7 @@
       </p:sp>
       <p:pic>
         <p:nvPicPr>
-          <p:cNvPr id="6" name="Image 1" descr="/home/rsedor/Dev/api-patterns-and-practices-grpc/presentation/_shared/assets/redhat-logo-white.png">    </p:cNvPr>
+          <p:cNvPr id="6" name="Image 1" descr="/tmp/pcwork/api-patterns-and-practices-grpc/presentation/_shared/assets/redhat-logo-white.png">    </p:cNvPr>
           <p:cNvPicPr>
             <a:picLocks noChangeAspect="1"/>
           </p:cNvPicPr>
@@ -8759,7 +8848,7 @@
       </p:sp>
       <p:pic>
         <p:nvPicPr>
-          <p:cNvPr id="3" name="Image 0" descr="/home/rsedor/Dev/api-patterns-and-practices-grpc/presentation/_shared/assets/logo-candidate-2.png">    </p:cNvPr>
+          <p:cNvPr id="3" name="Image 0" descr="/tmp/pcwork/api-patterns-and-practices-grpc/presentation/_shared/assets/logo-candidate-2.png">    </p:cNvPr>
           <p:cNvPicPr>
             <a:picLocks noChangeAspect="1"/>
           </p:cNvPicPr>
@@ -8861,7 +8950,7 @@
       </p:sp>
       <p:pic>
         <p:nvPicPr>
-          <p:cNvPr id="6" name="Image 1" descr="/home/rsedor/Dev/api-patterns-and-practices-grpc/presentation/_shared/png/08-server-streaming.png">    </p:cNvPr>
+          <p:cNvPr id="6" name="Image 1" descr="/tmp/pcwork/api-patterns-and-practices-grpc/presentation/_shared/png/08-server-streaming.png">    </p:cNvPr>
           <p:cNvPicPr>
             <a:picLocks noChangeAspect="1"/>
           </p:cNvPicPr>
@@ -8987,7 +9076,7 @@
       </p:sp>
       <p:pic>
         <p:nvPicPr>
-          <p:cNvPr id="3" name="Image 0" descr="/home/rsedor/Dev/api-patterns-and-practices-grpc/presentation/_shared/assets/logo-candidate-2.png">    </p:cNvPr>
+          <p:cNvPr id="3" name="Image 0" descr="/tmp/pcwork/api-patterns-and-practices-grpc/presentation/_shared/assets/logo-candidate-2.png">    </p:cNvPr>
           <p:cNvPicPr>
             <a:picLocks noChangeAspect="1"/>
           </p:cNvPicPr>
@@ -9573,7 +9662,7 @@
       </p:grpSpPr>
       <p:pic>
         <p:nvPicPr>
-          <p:cNvPr id="2" name="Image 0" descr="/home/rsedor/Dev/api-patterns-and-practices-grpc/presentation/_shared/assets/section-panel.png">    </p:cNvPr>
+          <p:cNvPr id="2" name="Image 0" descr="/tmp/pcwork/api-patterns-and-practices-grpc/presentation/_shared/assets/section-panel.png">    </p:cNvPr>
           <p:cNvPicPr>
             <a:picLocks noChangeAspect="1"/>
           </p:cNvPicPr>
@@ -9714,7 +9803,7 @@
       </p:sp>
       <p:pic>
         <p:nvPicPr>
-          <p:cNvPr id="6" name="Image 1" descr="/home/rsedor/Dev/api-patterns-and-practices-grpc/presentation/_shared/assets/redhat-logo-white.png">    </p:cNvPr>
+          <p:cNvPr id="6" name="Image 1" descr="/tmp/pcwork/api-patterns-and-practices-grpc/presentation/_shared/assets/redhat-logo-white.png">    </p:cNvPr>
           <p:cNvPicPr>
             <a:picLocks noChangeAspect="1"/>
           </p:cNvPicPr>
@@ -9802,7 +9891,7 @@
       </p:sp>
       <p:pic>
         <p:nvPicPr>
-          <p:cNvPr id="3" name="Image 0" descr="/home/rsedor/Dev/api-patterns-and-practices-grpc/presentation/_shared/assets/logo-candidate-2.png">    </p:cNvPr>
+          <p:cNvPr id="3" name="Image 0" descr="/tmp/pcwork/api-patterns-and-practices-grpc/presentation/_shared/assets/logo-candidate-2.png">    </p:cNvPr>
           <p:cNvPicPr>
             <a:picLocks noChangeAspect="1"/>
           </p:cNvPicPr>
@@ -9904,7 +9993,7 @@
       </p:sp>
       <p:pic>
         <p:nvPicPr>
-          <p:cNvPr id="6" name="Image 1" descr="/home/rsedor/Dev/api-patterns-and-practices-grpc/presentation/_shared/png/10-deadline-propagation.png">    </p:cNvPr>
+          <p:cNvPr id="6" name="Image 1" descr="/tmp/pcwork/api-patterns-and-practices-grpc/presentation/_shared/png/10-deadline-propagation.png">    </p:cNvPr>
           <p:cNvPicPr>
             <a:picLocks noChangeAspect="1"/>
           </p:cNvPicPr>
@@ -10030,7 +10119,7 @@
       </p:sp>
       <p:pic>
         <p:nvPicPr>
-          <p:cNvPr id="3" name="Image 0" descr="/home/rsedor/Dev/api-patterns-and-practices-grpc/presentation/_shared/assets/logo-candidate-2.png">    </p:cNvPr>
+          <p:cNvPr id="3" name="Image 0" descr="/tmp/pcwork/api-patterns-and-practices-grpc/presentation/_shared/assets/logo-candidate-2.png">    </p:cNvPr>
           <p:cNvPicPr>
             <a:picLocks noChangeAspect="1"/>
           </p:cNvPicPr>
@@ -10666,7 +10755,7 @@
       </p:sp>
       <p:pic>
         <p:nvPicPr>
-          <p:cNvPr id="3" name="Image 0" descr="/home/rsedor/Dev/api-patterns-and-practices-grpc/presentation/_shared/assets/logo-candidate-2.png">    </p:cNvPr>
+          <p:cNvPr id="3" name="Image 0" descr="/tmp/pcwork/api-patterns-and-practices-grpc/presentation/_shared/assets/logo-candidate-2.png">    </p:cNvPr>
           <p:cNvPicPr>
             <a:picLocks noChangeAspect="1"/>
           </p:cNvPicPr>
@@ -10768,7 +10857,7 @@
       </p:sp>
       <p:pic>
         <p:nvPicPr>
-          <p:cNvPr id="6" name="Image 1" descr="/home/rsedor/Dev/api-patterns-and-practices-grpc/presentation/_shared/png/11-rich-error-model.png">    </p:cNvPr>
+          <p:cNvPr id="6" name="Image 1" descr="/tmp/pcwork/api-patterns-and-practices-grpc/presentation/_shared/png/11-rich-error-model.png">    </p:cNvPr>
           <p:cNvPicPr>
             <a:picLocks noChangeAspect="1"/>
           </p:cNvPicPr>
@@ -10894,7 +10983,7 @@
       </p:sp>
       <p:pic>
         <p:nvPicPr>
-          <p:cNvPr id="3" name="Image 0" descr="/home/rsedor/Dev/api-patterns-and-practices-grpc/presentation/_shared/assets/logo-candidate-2.png">    </p:cNvPr>
+          <p:cNvPr id="3" name="Image 0" descr="/tmp/pcwork/api-patterns-and-practices-grpc/presentation/_shared/assets/logo-candidate-2.png">    </p:cNvPr>
           <p:cNvPicPr>
             <a:picLocks noChangeAspect="1"/>
           </p:cNvPicPr>
@@ -11392,7 +11481,7 @@
       </p:sp>
       <p:pic>
         <p:nvPicPr>
-          <p:cNvPr id="3" name="Image 0" descr="/home/rsedor/Dev/api-patterns-and-practices-grpc/presentation/_shared/assets/logo-candidate-2.png">    </p:cNvPr>
+          <p:cNvPr id="3" name="Image 0" descr="/tmp/pcwork/api-patterns-and-practices-grpc/presentation/_shared/assets/logo-candidate-2.png">    </p:cNvPr>
           <p:cNvPicPr>
             <a:picLocks noChangeAspect="1"/>
           </p:cNvPicPr>
@@ -12010,7 +12099,7 @@
       </p:sp>
       <p:pic>
         <p:nvPicPr>
-          <p:cNvPr id="3" name="Image 0" descr="/home/rsedor/Dev/api-patterns-and-practices-grpc/presentation/_shared/assets/logo-candidate-2.png">    </p:cNvPr>
+          <p:cNvPr id="3" name="Image 0" descr="/tmp/pcwork/api-patterns-and-practices-grpc/presentation/_shared/assets/logo-candidate-2.png">    </p:cNvPr>
           <p:cNvPicPr>
             <a:picLocks noChangeAspect="1"/>
           </p:cNvPicPr>
@@ -12686,7 +12775,7 @@
       </p:grpSpPr>
       <p:pic>
         <p:nvPicPr>
-          <p:cNvPr id="2" name="Image 0" descr="/home/rsedor/Dev/api-patterns-and-practices-grpc/presentation/_shared/assets/section-panel.png">    </p:cNvPr>
+          <p:cNvPr id="2" name="Image 0" descr="/tmp/pcwork/api-patterns-and-practices-grpc/presentation/_shared/assets/section-panel.png">    </p:cNvPr>
           <p:cNvPicPr>
             <a:picLocks noChangeAspect="1"/>
           </p:cNvPicPr>
@@ -12827,7 +12916,7 @@
       </p:sp>
       <p:pic>
         <p:nvPicPr>
-          <p:cNvPr id="6" name="Image 1" descr="/home/rsedor/Dev/api-patterns-and-practices-grpc/presentation/_shared/assets/redhat-logo-white.png">    </p:cNvPr>
+          <p:cNvPr id="6" name="Image 1" descr="/tmp/pcwork/api-patterns-and-practices-grpc/presentation/_shared/assets/redhat-logo-white.png">    </p:cNvPr>
           <p:cNvPicPr>
             <a:picLocks noChangeAspect="1"/>
           </p:cNvPicPr>
@@ -12915,7 +13004,7 @@
       </p:sp>
       <p:pic>
         <p:nvPicPr>
-          <p:cNvPr id="3" name="Image 0" descr="/home/rsedor/Dev/api-patterns-and-practices-grpc/presentation/_shared/assets/logo-candidate-2.png">    </p:cNvPr>
+          <p:cNvPr id="3" name="Image 0" descr="/tmp/pcwork/api-patterns-and-practices-grpc/presentation/_shared/assets/logo-candidate-2.png">    </p:cNvPr>
           <p:cNvPicPr>
             <a:picLocks noChangeAspect="1"/>
           </p:cNvPicPr>
@@ -13017,7 +13106,7 @@
       </p:sp>
       <p:pic>
         <p:nvPicPr>
-          <p:cNvPr id="6" name="Image 1" descr="/home/rsedor/Dev/api-patterns-and-practices-grpc/presentation/_shared/png/13-fieldmask-projection.png">    </p:cNvPr>
+          <p:cNvPr id="6" name="Image 1" descr="/tmp/pcwork/api-patterns-and-practices-grpc/presentation/_shared/png/13-fieldmask-projection.png">    </p:cNvPr>
           <p:cNvPicPr>
             <a:picLocks noChangeAspect="1"/>
           </p:cNvPicPr>
@@ -13143,7 +13232,7 @@
       </p:sp>
       <p:pic>
         <p:nvPicPr>
-          <p:cNvPr id="3" name="Image 0" descr="/home/rsedor/Dev/api-patterns-and-practices-grpc/presentation/_shared/assets/logo-candidate-2.png">    </p:cNvPr>
+          <p:cNvPr id="3" name="Image 0" descr="/tmp/pcwork/api-patterns-and-practices-grpc/presentation/_shared/assets/logo-candidate-2.png">    </p:cNvPr>
           <p:cNvPicPr>
             <a:picLocks noChangeAspect="1"/>
           </p:cNvPicPr>
@@ -13833,7 +13922,7 @@
       </p:sp>
       <p:pic>
         <p:nvPicPr>
-          <p:cNvPr id="3" name="Image 0" descr="/home/rsedor/Dev/api-patterns-and-practices-grpc/presentation/_shared/assets/logo-candidate-2.png">    </p:cNvPr>
+          <p:cNvPr id="3" name="Image 0" descr="/tmp/pcwork/api-patterns-and-practices-grpc/presentation/_shared/assets/logo-candidate-2.png">    </p:cNvPr>
           <p:cNvPicPr>
             <a:picLocks noChangeAspect="1"/>
           </p:cNvPicPr>
@@ -13935,7 +14024,7 @@
       </p:sp>
       <p:pic>
         <p:nvPicPr>
-          <p:cNvPr id="6" name="Image 1" descr="/home/rsedor/Dev/api-patterns-and-practices-grpc/presentation/_shared/png/14-buf-breaking-gate.png">    </p:cNvPr>
+          <p:cNvPr id="6" name="Image 1" descr="/tmp/pcwork/api-patterns-and-practices-grpc/presentation/_shared/png/14-buf-breaking-gate.png">    </p:cNvPr>
           <p:cNvPicPr>
             <a:picLocks noChangeAspect="1"/>
           </p:cNvPicPr>
@@ -14029,7 +14118,7 @@
       </p:grpSpPr>
       <p:pic>
         <p:nvPicPr>
-          <p:cNvPr id="2" name="Image 0" descr="/home/rsedor/Dev/api-patterns-and-practices-grpc/presentation/_shared/assets/section-panel.png">    </p:cNvPr>
+          <p:cNvPr id="2" name="Image 0" descr="/tmp/pcwork/api-patterns-and-practices-grpc/presentation/_shared/assets/section-panel.png">    </p:cNvPr>
           <p:cNvPicPr>
             <a:picLocks noChangeAspect="1"/>
           </p:cNvPicPr>
@@ -14170,7 +14259,7 @@
       </p:sp>
       <p:pic>
         <p:nvPicPr>
-          <p:cNvPr id="6" name="Image 1" descr="/home/rsedor/Dev/api-patterns-and-practices-grpc/presentation/_shared/assets/redhat-logo-white.png">    </p:cNvPr>
+          <p:cNvPr id="6" name="Image 1" descr="/tmp/pcwork/api-patterns-and-practices-grpc/presentation/_shared/assets/redhat-logo-white.png">    </p:cNvPr>
           <p:cNvPicPr>
             <a:picLocks noChangeAspect="1"/>
           </p:cNvPicPr>
@@ -14258,7 +14347,7 @@
       </p:sp>
       <p:pic>
         <p:nvPicPr>
-          <p:cNvPr id="3" name="Image 0" descr="/home/rsedor/Dev/api-patterns-and-practices-grpc/presentation/_shared/assets/logo-candidate-2.png">    </p:cNvPr>
+          <p:cNvPr id="3" name="Image 0" descr="/tmp/pcwork/api-patterns-and-practices-grpc/presentation/_shared/assets/logo-candidate-2.png">    </p:cNvPr>
           <p:cNvPicPr>
             <a:picLocks noChangeAspect="1"/>
           </p:cNvPicPr>
@@ -14360,7 +14449,7 @@
       </p:sp>
       <p:pic>
         <p:nvPicPr>
-          <p:cNvPr id="6" name="Image 1" descr="/home/rsedor/Dev/api-patterns-and-practices-grpc/presentation/_shared/png/15-jvm-execution-models.png">    </p:cNvPr>
+          <p:cNvPr id="6" name="Image 1" descr="/tmp/pcwork/api-patterns-and-practices-grpc/presentation/_shared/png/15-jvm-execution-models.png">    </p:cNvPr>
           <p:cNvPicPr>
             <a:picLocks noChangeAspect="1"/>
           </p:cNvPicPr>
@@ -14486,7 +14575,7 @@
       </p:sp>
       <p:pic>
         <p:nvPicPr>
-          <p:cNvPr id="3" name="Image 0" descr="/home/rsedor/Dev/api-patterns-and-practices-grpc/presentation/_shared/assets/logo-candidate-2.png">    </p:cNvPr>
+          <p:cNvPr id="3" name="Image 0" descr="/tmp/pcwork/api-patterns-and-practices-grpc/presentation/_shared/assets/logo-candidate-2.png">    </p:cNvPr>
           <p:cNvPicPr>
             <a:picLocks noChangeAspect="1"/>
           </p:cNvPicPr>
@@ -14588,7 +14677,7 @@
       </p:sp>
       <p:pic>
         <p:nvPicPr>
-          <p:cNvPr id="6" name="Image 1" descr="/home/rsedor/Dev/api-patterns-and-practices-grpc/presentation/_shared/png/15-thread-exhaustion-overlap.png">    </p:cNvPr>
+          <p:cNvPr id="6" name="Image 1" descr="/tmp/pcwork/api-patterns-and-practices-grpc/presentation/_shared/png/15-thread-exhaustion-overlap.png">    </p:cNvPr>
           <p:cNvPicPr>
             <a:picLocks noChangeAspect="1"/>
           </p:cNvPicPr>
@@ -14714,7 +14803,7 @@
       </p:sp>
       <p:pic>
         <p:nvPicPr>
-          <p:cNvPr id="3" name="Image 0" descr="/home/rsedor/Dev/api-patterns-and-practices-grpc/presentation/_shared/assets/logo-candidate-2.png">    </p:cNvPr>
+          <p:cNvPr id="3" name="Image 0" descr="/tmp/pcwork/api-patterns-and-practices-grpc/presentation/_shared/assets/logo-candidate-2.png">    </p:cNvPr>
           <p:cNvPicPr>
             <a:picLocks noChangeAspect="1"/>
           </p:cNvPicPr>
@@ -15332,7 +15421,7 @@
       </p:sp>
       <p:pic>
         <p:nvPicPr>
-          <p:cNvPr id="3" name="Image 0" descr="/home/rsedor/Dev/api-patterns-and-practices-grpc/presentation/_shared/assets/logo-candidate-2.png">    </p:cNvPr>
+          <p:cNvPr id="3" name="Image 0" descr="/tmp/pcwork/api-patterns-and-practices-grpc/presentation/_shared/assets/logo-candidate-2.png">    </p:cNvPr>
           <p:cNvPicPr>
             <a:picLocks noChangeAspect="1"/>
           </p:cNvPicPr>
@@ -15623,7 +15712,7 @@
       </p:grpSpPr>
       <p:pic>
         <p:nvPicPr>
-          <p:cNvPr id="2" name="Image 0" descr="/home/rsedor/Dev/api-patterns-and-practices-grpc/presentation/_shared/assets/section-panel.png">    </p:cNvPr>
+          <p:cNvPr id="2" name="Image 0" descr="/tmp/pcwork/api-patterns-and-practices-grpc/presentation/_shared/assets/section-panel.png">    </p:cNvPr>
           <p:cNvPicPr>
             <a:picLocks noChangeAspect="1"/>
           </p:cNvPicPr>
@@ -15764,7 +15853,7 @@
       </p:sp>
       <p:pic>
         <p:nvPicPr>
-          <p:cNvPr id="6" name="Image 1" descr="/home/rsedor/Dev/api-patterns-and-practices-grpc/presentation/_shared/assets/redhat-logo-white.png">    </p:cNvPr>
+          <p:cNvPr id="6" name="Image 1" descr="/tmp/pcwork/api-patterns-and-practices-grpc/presentation/_shared/assets/redhat-logo-white.png">    </p:cNvPr>
           <p:cNvPicPr>
             <a:picLocks noChangeAspect="1"/>
           </p:cNvPicPr>
@@ -15852,7 +15941,7 @@
       </p:sp>
       <p:pic>
         <p:nvPicPr>
-          <p:cNvPr id="3" name="Image 0" descr="/home/rsedor/Dev/api-patterns-and-practices-grpc/presentation/_shared/assets/logo-candidate-2.png">    </p:cNvPr>
+          <p:cNvPr id="3" name="Image 0" descr="/tmp/pcwork/api-patterns-and-practices-grpc/presentation/_shared/assets/logo-candidate-2.png">    </p:cNvPr>
           <p:cNvPicPr>
             <a:picLocks noChangeAspect="1"/>
           </p:cNvPicPr>
@@ -15954,7 +16043,7 @@
       </p:sp>
       <p:pic>
         <p:nvPicPr>
-          <p:cNvPr id="6" name="Image 1" descr="/home/rsedor/Dev/api-patterns-and-practices-grpc/presentation/_shared/png/16-operation-lifecycle.png">    </p:cNvPr>
+          <p:cNvPr id="6" name="Image 1" descr="/tmp/pcwork/api-patterns-and-practices-grpc/presentation/_shared/png/16-operation-lifecycle.png">    </p:cNvPr>
           <p:cNvPicPr>
             <a:picLocks noChangeAspect="1"/>
           </p:cNvPicPr>
@@ -16080,7 +16169,7 @@
       </p:sp>
       <p:pic>
         <p:nvPicPr>
-          <p:cNvPr id="3" name="Image 0" descr="/home/rsedor/Dev/api-patterns-and-practices-grpc/presentation/_shared/assets/logo-candidate-2.png">    </p:cNvPr>
+          <p:cNvPr id="3" name="Image 0" descr="/tmp/pcwork/api-patterns-and-practices-grpc/presentation/_shared/assets/logo-candidate-2.png">    </p:cNvPr>
           <p:cNvPicPr>
             <a:picLocks noChangeAspect="1"/>
           </p:cNvPicPr>
@@ -16738,7 +16827,7 @@
       </p:grpSpPr>
       <p:pic>
         <p:nvPicPr>
-          <p:cNvPr id="2" name="Image 0" descr="/home/rsedor/Dev/api-patterns-and-practices-grpc/presentation/_shared/assets/section-panel.png">    </p:cNvPr>
+          <p:cNvPr id="2" name="Image 0" descr="/tmp/pcwork/api-patterns-and-practices-grpc/presentation/_shared/assets/section-panel.png">    </p:cNvPr>
           <p:cNvPicPr>
             <a:picLocks noChangeAspect="1"/>
           </p:cNvPicPr>
@@ -16879,7 +16968,7 @@
       </p:sp>
       <p:pic>
         <p:nvPicPr>
-          <p:cNvPr id="6" name="Image 1" descr="/home/rsedor/Dev/api-patterns-and-practices-grpc/presentation/_shared/assets/redhat-logo-white.png">    </p:cNvPr>
+          <p:cNvPr id="6" name="Image 1" descr="/tmp/pcwork/api-patterns-and-practices-grpc/presentation/_shared/assets/redhat-logo-white.png">    </p:cNvPr>
           <p:cNvPicPr>
             <a:picLocks noChangeAspect="1"/>
           </p:cNvPicPr>
@@ -16967,7 +17056,7 @@
       </p:sp>
       <p:pic>
         <p:nvPicPr>
-          <p:cNvPr id="3" name="Image 0" descr="/home/rsedor/Dev/api-patterns-and-practices-grpc/presentation/_shared/assets/logo-candidate-2.png">    </p:cNvPr>
+          <p:cNvPr id="3" name="Image 0" descr="/tmp/pcwork/api-patterns-and-practices-grpc/presentation/_shared/assets/logo-candidate-2.png">    </p:cNvPr>
           <p:cNvPicPr>
             <a:picLocks noChangeAspect="1"/>
           </p:cNvPicPr>
@@ -17069,7 +17158,7 @@
       </p:sp>
       <p:pic>
         <p:nvPicPr>
-          <p:cNvPr id="6" name="Image 1" descr="/home/rsedor/Dev/api-patterns-and-practices-grpc/presentation/_shared/png/17-slow-consumer-backpressure.png">    </p:cNvPr>
+          <p:cNvPr id="6" name="Image 1" descr="/tmp/pcwork/api-patterns-and-practices-grpc/presentation/_shared/png/17-slow-consumer-backpressure.png">    </p:cNvPr>
           <p:cNvPicPr>
             <a:picLocks noChangeAspect="1"/>
           </p:cNvPicPr>
@@ -17195,7 +17284,7 @@
       </p:sp>
       <p:pic>
         <p:nvPicPr>
-          <p:cNvPr id="3" name="Image 0" descr="/home/rsedor/Dev/api-patterns-and-practices-grpc/presentation/_shared/assets/logo-candidate-2.png">    </p:cNvPr>
+          <p:cNvPr id="3" name="Image 0" descr="/tmp/pcwork/api-patterns-and-practices-grpc/presentation/_shared/assets/logo-candidate-2.png">    </p:cNvPr>
           <p:cNvPicPr>
             <a:picLocks noChangeAspect="1"/>
           </p:cNvPicPr>
@@ -17849,7 +17938,7 @@
       </p:sp>
       <p:pic>
         <p:nvPicPr>
-          <p:cNvPr id="3" name="Image 0" descr="/home/rsedor/Dev/api-patterns-and-practices-grpc/presentation/_shared/assets/logo-candidate-2.png">    </p:cNvPr>
+          <p:cNvPr id="3" name="Image 0" descr="/tmp/pcwork/api-patterns-and-practices-grpc/presentation/_shared/assets/logo-candidate-2.png">    </p:cNvPr>
           <p:cNvPicPr>
             <a:picLocks noChangeAspect="1"/>
           </p:cNvPicPr>
@@ -17951,7 +18040,7 @@
       </p:sp>
       <p:pic>
         <p:nvPicPr>
-          <p:cNvPr id="6" name="Image 1" descr="/home/rsedor/Dev/api-patterns-and-practices-grpc/presentation/_shared/png/18-performance-levers.png">    </p:cNvPr>
+          <p:cNvPr id="6" name="Image 1" descr="/tmp/pcwork/api-patterns-and-practices-grpc/presentation/_shared/png/18-performance-levers.png">    </p:cNvPr>
           <p:cNvPicPr>
             <a:picLocks noChangeAspect="1"/>
           </p:cNvPicPr>
@@ -18077,7 +18166,7 @@
       </p:sp>
       <p:pic>
         <p:nvPicPr>
-          <p:cNvPr id="3" name="Image 0" descr="/home/rsedor/Dev/api-patterns-and-practices-grpc/presentation/_shared/assets/logo-candidate-2.png">    </p:cNvPr>
+          <p:cNvPr id="3" name="Image 0" descr="/tmp/pcwork/api-patterns-and-practices-grpc/presentation/_shared/assets/logo-candidate-2.png">    </p:cNvPr>
           <p:cNvPicPr>
             <a:picLocks noChangeAspect="1"/>
           </p:cNvPicPr>
@@ -18609,7 +18698,7 @@
       </p:grpSpPr>
       <p:pic>
         <p:nvPicPr>
-          <p:cNvPr id="2" name="Image 0" descr="/home/rsedor/Dev/api-patterns-and-practices-grpc/presentation/_shared/assets/section-panel.png">    </p:cNvPr>
+          <p:cNvPr id="2" name="Image 0" descr="/tmp/pcwork/api-patterns-and-practices-grpc/presentation/_shared/assets/section-panel.png">    </p:cNvPr>
           <p:cNvPicPr>
             <a:picLocks noChangeAspect="1"/>
           </p:cNvPicPr>
@@ -18750,7 +18839,7 @@
       </p:sp>
       <p:pic>
         <p:nvPicPr>
-          <p:cNvPr id="6" name="Image 1" descr="/home/rsedor/Dev/api-patterns-and-practices-grpc/presentation/_shared/assets/redhat-logo-white.png">    </p:cNvPr>
+          <p:cNvPr id="6" name="Image 1" descr="/tmp/pcwork/api-patterns-and-practices-grpc/presentation/_shared/assets/redhat-logo-white.png">    </p:cNvPr>
           <p:cNvPicPr>
             <a:picLocks noChangeAspect="1"/>
           </p:cNvPicPr>
@@ -18838,7 +18927,7 @@
       </p:sp>
       <p:pic>
         <p:nvPicPr>
-          <p:cNvPr id="3" name="Image 0" descr="/home/rsedor/Dev/api-patterns-and-practices-grpc/presentation/_shared/assets/logo-candidate-2.png">    </p:cNvPr>
+          <p:cNvPr id="3" name="Image 0" descr="/tmp/pcwork/api-patterns-and-practices-grpc/presentation/_shared/assets/logo-candidate-2.png">    </p:cNvPr>
           <p:cNvPicPr>
             <a:picLocks noChangeAspect="1"/>
           </p:cNvPicPr>
@@ -18940,7 +19029,7 @@
       </p:sp>
       <p:pic>
         <p:nvPicPr>
-          <p:cNvPr id="6" name="Image 1" descr="/home/rsedor/Dev/api-patterns-and-practices-grpc/presentation/_shared/png/19-mtls-mutual-verification.png">    </p:cNvPr>
+          <p:cNvPr id="6" name="Image 1" descr="/tmp/pcwork/api-patterns-and-practices-grpc/presentation/_shared/png/19-mtls-mutual-verification.png">    </p:cNvPr>
           <p:cNvPicPr>
             <a:picLocks noChangeAspect="1"/>
           </p:cNvPicPr>
@@ -19034,7 +19123,7 @@
       </p:grpSpPr>
       <p:pic>
         <p:nvPicPr>
-          <p:cNvPr id="2" name="Image 0" descr="/home/rsedor/Dev/api-patterns-and-practices-grpc/presentation/_shared/assets/section-panel.png">    </p:cNvPr>
+          <p:cNvPr id="2" name="Image 0" descr="/tmp/pcwork/api-patterns-and-practices-grpc/presentation/_shared/assets/section-panel.png">    </p:cNvPr>
           <p:cNvPicPr>
             <a:picLocks noChangeAspect="1"/>
           </p:cNvPicPr>
@@ -19175,7 +19264,7 @@
       </p:sp>
       <p:pic>
         <p:nvPicPr>
-          <p:cNvPr id="6" name="Image 1" descr="/home/rsedor/Dev/api-patterns-and-practices-grpc/presentation/_shared/assets/redhat-logo-white.png">    </p:cNvPr>
+          <p:cNvPr id="6" name="Image 1" descr="/tmp/pcwork/api-patterns-and-practices-grpc/presentation/_shared/assets/redhat-logo-white.png">    </p:cNvPr>
           <p:cNvPicPr>
             <a:picLocks noChangeAspect="1"/>
           </p:cNvPicPr>
@@ -19263,7 +19352,7 @@
       </p:sp>
       <p:pic>
         <p:nvPicPr>
-          <p:cNvPr id="3" name="Image 0" descr="/home/rsedor/Dev/api-patterns-and-practices-grpc/presentation/_shared/assets/logo-candidate-2.png">    </p:cNvPr>
+          <p:cNvPr id="3" name="Image 0" descr="/tmp/pcwork/api-patterns-and-practices-grpc/presentation/_shared/assets/logo-candidate-2.png">    </p:cNvPr>
           <p:cNvPicPr>
             <a:picLocks noChangeAspect="1"/>
           </p:cNvPicPr>
@@ -19845,7 +19934,7 @@
       </p:sp>
       <p:pic>
         <p:nvPicPr>
-          <p:cNvPr id="3" name="Image 0" descr="/home/rsedor/Dev/api-patterns-and-practices-grpc/presentation/_shared/assets/logo-candidate-2.png">    </p:cNvPr>
+          <p:cNvPr id="3" name="Image 0" descr="/tmp/pcwork/api-patterns-and-practices-grpc/presentation/_shared/assets/logo-candidate-2.png">    </p:cNvPr>
           <p:cNvPicPr>
             <a:picLocks noChangeAspect="1"/>
           </p:cNvPicPr>
@@ -19947,7 +20036,7 @@
       </p:sp>
       <p:pic>
         <p:nvPicPr>
-          <p:cNvPr id="6" name="Image 1" descr="/home/rsedor/Dev/api-patterns-and-practices-grpc/presentation/_shared/png/20-jwt-in-metadata-flow.png">    </p:cNvPr>
+          <p:cNvPr id="6" name="Image 1" descr="/tmp/pcwork/api-patterns-and-practices-grpc/presentation/_shared/png/20-jwt-in-metadata-flow.png">    </p:cNvPr>
           <p:cNvPicPr>
             <a:picLocks noChangeAspect="1"/>
           </p:cNvPicPr>
@@ -20073,7 +20162,7 @@
       </p:sp>
       <p:pic>
         <p:nvPicPr>
-          <p:cNvPr id="3" name="Image 0" descr="/home/rsedor/Dev/api-patterns-and-practices-grpc/presentation/_shared/assets/logo-candidate-2.png">    </p:cNvPr>
+          <p:cNvPr id="3" name="Image 0" descr="/tmp/pcwork/api-patterns-and-practices-grpc/presentation/_shared/assets/logo-candidate-2.png">    </p:cNvPr>
           <p:cNvPicPr>
             <a:picLocks noChangeAspect="1"/>
           </p:cNvPicPr>
@@ -20731,7 +20820,7 @@
       </p:grpSpPr>
       <p:pic>
         <p:nvPicPr>
-          <p:cNvPr id="2" name="Image 0" descr="/home/rsedor/Dev/api-patterns-and-practices-grpc/presentation/_shared/assets/section-panel.png">    </p:cNvPr>
+          <p:cNvPr id="2" name="Image 0" descr="/tmp/pcwork/api-patterns-and-practices-grpc/presentation/_shared/assets/section-panel.png">    </p:cNvPr>
           <p:cNvPicPr>
             <a:picLocks noChangeAspect="1"/>
           </p:cNvPicPr>
@@ -20872,7 +20961,7 @@
       </p:sp>
       <p:pic>
         <p:nvPicPr>
-          <p:cNvPr id="6" name="Image 1" descr="/home/rsedor/Dev/api-patterns-and-practices-grpc/presentation/_shared/assets/redhat-logo-white.png">    </p:cNvPr>
+          <p:cNvPr id="6" name="Image 1" descr="/tmp/pcwork/api-patterns-and-practices-grpc/presentation/_shared/assets/redhat-logo-white.png">    </p:cNvPr>
           <p:cNvPicPr>
             <a:picLocks noChangeAspect="1"/>
           </p:cNvPicPr>
@@ -20960,7 +21049,7 @@
       </p:sp>
       <p:pic>
         <p:nvPicPr>
-          <p:cNvPr id="3" name="Image 0" descr="/home/rsedor/Dev/api-patterns-and-practices-grpc/presentation/_shared/assets/logo-candidate-2.png">    </p:cNvPr>
+          <p:cNvPr id="3" name="Image 0" descr="/tmp/pcwork/api-patterns-and-practices-grpc/presentation/_shared/assets/logo-candidate-2.png">    </p:cNvPr>
           <p:cNvPicPr>
             <a:picLocks noChangeAspect="1"/>
           </p:cNvPicPr>
@@ -21062,7 +21151,7 @@
       </p:sp>
       <p:pic>
         <p:nvPicPr>
-          <p:cNvPr id="6" name="Image 1" descr="/home/rsedor/Dev/api-patterns-and-practices-grpc/presentation/_shared/png/21-otel-trace-seam.png">    </p:cNvPr>
+          <p:cNvPr id="6" name="Image 1" descr="/tmp/pcwork/api-patterns-and-practices-grpc/presentation/_shared/png/21-otel-trace-seam.png">    </p:cNvPr>
           <p:cNvPicPr>
             <a:picLocks noChangeAspect="1"/>
           </p:cNvPicPr>
@@ -21188,7 +21277,7 @@
       </p:sp>
       <p:pic>
         <p:nvPicPr>
-          <p:cNvPr id="3" name="Image 0" descr="/home/rsedor/Dev/api-patterns-and-practices-grpc/presentation/_shared/assets/logo-candidate-2.png">    </p:cNvPr>
+          <p:cNvPr id="3" name="Image 0" descr="/tmp/pcwork/api-patterns-and-practices-grpc/presentation/_shared/assets/logo-candidate-2.png">    </p:cNvPr>
           <p:cNvPicPr>
             <a:picLocks noChangeAspect="1"/>
           </p:cNvPicPr>
@@ -21756,7 +21845,7 @@
       </p:grpSpPr>
       <p:pic>
         <p:nvPicPr>
-          <p:cNvPr id="2" name="Image 0" descr="/home/rsedor/Dev/api-patterns-and-practices-grpc/presentation/_shared/assets/section-panel.png">    </p:cNvPr>
+          <p:cNvPr id="2" name="Image 0" descr="/tmp/pcwork/api-patterns-and-practices-grpc/presentation/_shared/assets/section-panel.png">    </p:cNvPr>
           <p:cNvPicPr>
             <a:picLocks noChangeAspect="1"/>
           </p:cNvPicPr>
@@ -21897,7 +21986,7 @@
       </p:sp>
       <p:pic>
         <p:nvPicPr>
-          <p:cNvPr id="6" name="Image 1" descr="/home/rsedor/Dev/api-patterns-and-practices-grpc/presentation/_shared/assets/redhat-logo-white.png">    </p:cNvPr>
+          <p:cNvPr id="6" name="Image 1" descr="/tmp/pcwork/api-patterns-and-practices-grpc/presentation/_shared/assets/redhat-logo-white.png">    </p:cNvPr>
           <p:cNvPicPr>
             <a:picLocks noChangeAspect="1"/>
           </p:cNvPicPr>
@@ -21985,7 +22074,7 @@
       </p:sp>
       <p:pic>
         <p:nvPicPr>
-          <p:cNvPr id="3" name="Image 0" descr="/home/rsedor/Dev/api-patterns-and-practices-grpc/presentation/_shared/assets/logo-candidate-2.png">    </p:cNvPr>
+          <p:cNvPr id="3" name="Image 0" descr="/tmp/pcwork/api-patterns-and-practices-grpc/presentation/_shared/assets/logo-candidate-2.png">    </p:cNvPr>
           <p:cNvPicPr>
             <a:picLocks noChangeAspect="1"/>
           </p:cNvPicPr>
@@ -22087,7 +22176,7 @@
       </p:sp>
       <p:pic>
         <p:nvPicPr>
-          <p:cNvPr id="6" name="Image 1" descr="/home/rsedor/Dev/api-patterns-and-practices-grpc/presentation/_shared/png/22-grpc-lb-problem.png">    </p:cNvPr>
+          <p:cNvPr id="6" name="Image 1" descr="/tmp/pcwork/api-patterns-and-practices-grpc/presentation/_shared/png/22-grpc-lb-problem.png">    </p:cNvPr>
           <p:cNvPicPr>
             <a:picLocks noChangeAspect="1"/>
           </p:cNvPicPr>
@@ -22213,7 +22302,7 @@
       </p:sp>
       <p:pic>
         <p:nvPicPr>
-          <p:cNvPr id="3" name="Image 0" descr="/home/rsedor/Dev/api-patterns-and-practices-grpc/presentation/_shared/assets/logo-candidate-2.png">    </p:cNvPr>
+          <p:cNvPr id="3" name="Image 0" descr="/tmp/pcwork/api-patterns-and-practices-grpc/presentation/_shared/assets/logo-candidate-2.png">    </p:cNvPr>
           <p:cNvPicPr>
             <a:picLocks noChangeAspect="1"/>
           </p:cNvPicPr>
@@ -22315,7 +22404,7 @@
       </p:sp>
       <p:pic>
         <p:nvPicPr>
-          <p:cNvPr id="6" name="Image 1" descr="/home/rsedor/Dev/api-patterns-and-practices-grpc/presentation/_shared/png/22-l4-vs-l7-balancing.png">    </p:cNvPr>
+          <p:cNvPr id="6" name="Image 1" descr="/tmp/pcwork/api-patterns-and-practices-grpc/presentation/_shared/png/22-l4-vs-l7-balancing.png">    </p:cNvPr>
           <p:cNvPicPr>
             <a:picLocks noChangeAspect="1"/>
           </p:cNvPicPr>
@@ -22409,7 +22498,7 @@
       </p:grpSpPr>
       <p:pic>
         <p:nvPicPr>
-          <p:cNvPr id="2" name="Image 0" descr="/home/rsedor/Dev/api-patterns-and-practices-grpc/presentation/_shared/assets/section-panel.png">    </p:cNvPr>
+          <p:cNvPr id="2" name="Image 0" descr="/tmp/pcwork/api-patterns-and-practices-grpc/presentation/_shared/assets/section-panel.png">    </p:cNvPr>
           <p:cNvPicPr>
             <a:picLocks noChangeAspect="1"/>
           </p:cNvPicPr>
@@ -22550,7 +22639,7 @@
       </p:sp>
       <p:pic>
         <p:nvPicPr>
-          <p:cNvPr id="6" name="Image 1" descr="/home/rsedor/Dev/api-patterns-and-practices-grpc/presentation/_shared/assets/redhat-logo-white.png">    </p:cNvPr>
+          <p:cNvPr id="6" name="Image 1" descr="/tmp/pcwork/api-patterns-and-practices-grpc/presentation/_shared/assets/redhat-logo-white.png">    </p:cNvPr>
           <p:cNvPicPr>
             <a:picLocks noChangeAspect="1"/>
           </p:cNvPicPr>
@@ -22638,7 +22727,7 @@
       </p:sp>
       <p:pic>
         <p:nvPicPr>
-          <p:cNvPr id="3" name="Image 0" descr="/home/rsedor/Dev/api-patterns-and-practices-grpc/presentation/_shared/assets/logo-candidate-2.png">    </p:cNvPr>
+          <p:cNvPr id="3" name="Image 0" descr="/tmp/pcwork/api-patterns-and-practices-grpc/presentation/_shared/assets/logo-candidate-2.png">    </p:cNvPr>
           <p:cNvPicPr>
             <a:picLocks noChangeAspect="1"/>
           </p:cNvPicPr>
@@ -22740,7 +22829,7 @@
       </p:sp>
       <p:pic>
         <p:nvPicPr>
-          <p:cNvPr id="6" name="Image 1" descr="/home/rsedor/Dev/api-patterns-and-practices-grpc/presentation/_shared/png/05-contract-first-buf-flow.png">    </p:cNvPr>
+          <p:cNvPr id="6" name="Image 1" descr="/tmp/pcwork/api-patterns-and-practices-grpc/presentation/_shared/png/05-contract-first-buf-flow.png">    </p:cNvPr>
           <p:cNvPicPr>
             <a:picLocks noChangeAspect="1"/>
           </p:cNvPicPr>
@@ -22866,7 +22955,7 @@
       </p:sp>
       <p:pic>
         <p:nvPicPr>
-          <p:cNvPr id="3" name="Image 0" descr="/home/rsedor/Dev/api-patterns-and-practices-grpc/presentation/_shared/assets/logo-candidate-2.png">    </p:cNvPr>
+          <p:cNvPr id="3" name="Image 0" descr="/tmp/pcwork/api-patterns-and-practices-grpc/presentation/_shared/assets/logo-candidate-2.png">    </p:cNvPr>
           <p:cNvPicPr>
             <a:picLocks noChangeAspect="1"/>
           </p:cNvPicPr>
@@ -22968,7 +23057,7 @@
       </p:sp>
       <p:pic>
         <p:nvPicPr>
-          <p:cNvPr id="6" name="Image 1" descr="/home/rsedor/Dev/api-patterns-and-practices-grpc/presentation/_shared/png/23-grpc-web-transcoding-seam.png">    </p:cNvPr>
+          <p:cNvPr id="6" name="Image 1" descr="/tmp/pcwork/api-patterns-and-practices-grpc/presentation/_shared/png/23-grpc-web-transcoding-seam.png">    </p:cNvPr>
           <p:cNvPicPr>
             <a:picLocks noChangeAspect="1"/>
           </p:cNvPicPr>
@@ -23094,7 +23183,7 @@
       </p:sp>
       <p:pic>
         <p:nvPicPr>
-          <p:cNvPr id="3" name="Image 0" descr="/home/rsedor/Dev/api-patterns-and-practices-grpc/presentation/_shared/assets/logo-candidate-2.png">    </p:cNvPr>
+          <p:cNvPr id="3" name="Image 0" descr="/tmp/pcwork/api-patterns-and-practices-grpc/presentation/_shared/assets/logo-candidate-2.png">    </p:cNvPr>
           <p:cNvPicPr>
             <a:picLocks noChangeAspect="1"/>
           </p:cNvPicPr>
@@ -23734,7 +23823,7 @@
       </p:grpSpPr>
       <p:pic>
         <p:nvPicPr>
-          <p:cNvPr id="2" name="Image 0" descr="/home/rsedor/Dev/api-patterns-and-practices-grpc/presentation/_shared/assets/section-panel.png">    </p:cNvPr>
+          <p:cNvPr id="2" name="Image 0" descr="/tmp/pcwork/api-patterns-and-practices-grpc/presentation/_shared/assets/section-panel.png">    </p:cNvPr>
           <p:cNvPicPr>
             <a:picLocks noChangeAspect="1"/>
           </p:cNvPicPr>
@@ -23875,7 +23964,7 @@
       </p:sp>
       <p:pic>
         <p:nvPicPr>
-          <p:cNvPr id="6" name="Image 1" descr="/home/rsedor/Dev/api-patterns-and-practices-grpc/presentation/_shared/assets/redhat-logo-white.png">    </p:cNvPr>
+          <p:cNvPr id="6" name="Image 1" descr="/tmp/pcwork/api-patterns-and-practices-grpc/presentation/_shared/assets/redhat-logo-white.png">    </p:cNvPr>
           <p:cNvPicPr>
             <a:picLocks noChangeAspect="1"/>
           </p:cNvPicPr>
@@ -23963,7 +24052,7 @@
       </p:sp>
       <p:pic>
         <p:nvPicPr>
-          <p:cNvPr id="3" name="Image 0" descr="/home/rsedor/Dev/api-patterns-and-practices-grpc/presentation/_shared/assets/logo-candidate-2.png">    </p:cNvPr>
+          <p:cNvPr id="3" name="Image 0" descr="/tmp/pcwork/api-patterns-and-practices-grpc/presentation/_shared/assets/logo-candidate-2.png">    </p:cNvPr>
           <p:cNvPicPr>
             <a:picLocks noChangeAspect="1"/>
           </p:cNvPicPr>
@@ -24065,7 +24154,7 @@
       </p:sp>
       <p:pic>
         <p:nvPicPr>
-          <p:cNvPr id="6" name="Image 1" descr="/home/rsedor/Dev/api-patterns-and-practices-grpc/presentation/_shared/png/25-grpc-test-pyramid.png">    </p:cNvPr>
+          <p:cNvPr id="6" name="Image 1" descr="/tmp/pcwork/api-patterns-and-practices-grpc/presentation/_shared/png/25-grpc-test-pyramid.png">    </p:cNvPr>
           <p:cNvPicPr>
             <a:picLocks noChangeAspect="1"/>
           </p:cNvPicPr>
@@ -24191,7 +24280,7 @@
       </p:sp>
       <p:pic>
         <p:nvPicPr>
-          <p:cNvPr id="3" name="Image 0" descr="/home/rsedor/Dev/api-patterns-and-practices-grpc/presentation/_shared/assets/logo-candidate-2.png">    </p:cNvPr>
+          <p:cNvPr id="3" name="Image 0" descr="/tmp/pcwork/api-patterns-and-practices-grpc/presentation/_shared/assets/logo-candidate-2.png">    </p:cNvPr>
           <p:cNvPicPr>
             <a:picLocks noChangeAspect="1"/>
           </p:cNvPicPr>
@@ -24863,7 +24952,7 @@
       </p:sp>
       <p:pic>
         <p:nvPicPr>
-          <p:cNvPr id="3" name="Image 0" descr="/home/rsedor/Dev/api-patterns-and-practices-grpc/presentation/_shared/assets/logo-candidate-2.png">    </p:cNvPr>
+          <p:cNvPr id="3" name="Image 0" descr="/tmp/pcwork/api-patterns-and-practices-grpc/presentation/_shared/assets/logo-candidate-2.png">    </p:cNvPr>
           <p:cNvPicPr>
             <a:picLocks noChangeAspect="1"/>
           </p:cNvPicPr>
@@ -25413,7 +25502,7 @@
       </p:grpSpPr>
       <p:pic>
         <p:nvPicPr>
-          <p:cNvPr id="2" name="Image 0" descr="/home/rsedor/Dev/api-patterns-and-practices-grpc/presentation/_shared/assets/section-panel.png">    </p:cNvPr>
+          <p:cNvPr id="2" name="Image 0" descr="/tmp/pcwork/api-patterns-and-practices-grpc/presentation/_shared/assets/section-panel.png">    </p:cNvPr>
           <p:cNvPicPr>
             <a:picLocks noChangeAspect="1"/>
           </p:cNvPicPr>
@@ -25554,7 +25643,7 @@
       </p:sp>
       <p:pic>
         <p:nvPicPr>
-          <p:cNvPr id="6" name="Image 1" descr="/home/rsedor/Dev/api-patterns-and-practices-grpc/presentation/_shared/assets/redhat-logo-white.png">    </p:cNvPr>
+          <p:cNvPr id="6" name="Image 1" descr="/tmp/pcwork/api-patterns-and-practices-grpc/presentation/_shared/assets/redhat-logo-white.png">    </p:cNvPr>
           <p:cNvPicPr>
             <a:picLocks noChangeAspect="1"/>
           </p:cNvPicPr>
@@ -25642,7 +25731,7 @@
       </p:sp>
       <p:pic>
         <p:nvPicPr>
-          <p:cNvPr id="3" name="Image 0" descr="/home/rsedor/Dev/api-patterns-and-practices-grpc/presentation/_shared/assets/logo-candidate-2.png">    </p:cNvPr>
+          <p:cNvPr id="3" name="Image 0" descr="/tmp/pcwork/api-patterns-and-practices-grpc/presentation/_shared/assets/logo-candidate-2.png">    </p:cNvPr>
           <p:cNvPicPr>
             <a:picLocks noChangeAspect="1"/>
           </p:cNvPicPr>
@@ -25744,7 +25833,7 @@
       </p:sp>
       <p:pic>
         <p:nvPicPr>
-          <p:cNvPr id="6" name="Image 1" descr="/home/rsedor/Dev/api-patterns-and-practices-grpc/presentation/_shared/png/27-final-project-architecture.png">    </p:cNvPr>
+          <p:cNvPr id="6" name="Image 1" descr="/tmp/pcwork/api-patterns-and-practices-grpc/presentation/_shared/png/27-final-project-architecture.png">    </p:cNvPr>
           <p:cNvPicPr>
             <a:picLocks noChangeAspect="1"/>
           </p:cNvPicPr>
@@ -25870,7 +25959,7 @@
       </p:sp>
       <p:pic>
         <p:nvPicPr>
-          <p:cNvPr id="3" name="Image 0" descr="/home/rsedor/Dev/api-patterns-and-practices-grpc/presentation/_shared/assets/logo-candidate-2.png">    </p:cNvPr>
+          <p:cNvPr id="3" name="Image 0" descr="/tmp/pcwork/api-patterns-and-practices-grpc/presentation/_shared/assets/logo-candidate-2.png">    </p:cNvPr>
           <p:cNvPicPr>
             <a:picLocks noChangeAspect="1"/>
           </p:cNvPicPr>
@@ -26524,7 +26613,7 @@
       </p:sp>
       <p:pic>
         <p:nvPicPr>
-          <p:cNvPr id="3" name="Image 0" descr="/home/rsedor/Dev/api-patterns-and-practices-grpc/presentation/_shared/assets/logo-candidate-2.png">    </p:cNvPr>
+          <p:cNvPr id="3" name="Image 0" descr="/tmp/pcwork/api-patterns-and-practices-grpc/presentation/_shared/assets/logo-candidate-2.png">    </p:cNvPr>
           <p:cNvPicPr>
             <a:picLocks noChangeAspect="1"/>
           </p:cNvPicPr>
@@ -26926,7 +27015,7 @@
       </p:sp>
       <p:pic>
         <p:nvPicPr>
-          <p:cNvPr id="3" name="Image 0" descr="/home/rsedor/Dev/api-patterns-and-practices-grpc/presentation/_shared/assets/logo-candidate-2.png">    </p:cNvPr>
+          <p:cNvPr id="3" name="Image 0" descr="/tmp/pcwork/api-patterns-and-practices-grpc/presentation/_shared/assets/logo-candidate-2.png">    </p:cNvPr>
           <p:cNvPicPr>
             <a:picLocks noChangeAspect="1"/>
           </p:cNvPicPr>
@@ -27476,7 +27565,7 @@
       </p:grpSpPr>
       <p:pic>
         <p:nvPicPr>
-          <p:cNvPr id="2" name="Image 0" descr="/home/rsedor/Dev/api-patterns-and-practices-grpc/presentation/_shared/assets/section-panel.png">    </p:cNvPr>
+          <p:cNvPr id="2" name="Image 0" descr="/tmp/pcwork/api-patterns-and-practices-grpc/presentation/_shared/assets/section-panel.png">    </p:cNvPr>
           <p:cNvPicPr>
             <a:picLocks noChangeAspect="1"/>
           </p:cNvPicPr>
@@ -27617,7 +27706,7 @@
       </p:sp>
       <p:pic>
         <p:nvPicPr>
-          <p:cNvPr id="6" name="Image 1" descr="/home/rsedor/Dev/api-patterns-and-practices-grpc/presentation/_shared/assets/redhat-logo-white.png">    </p:cNvPr>
+          <p:cNvPr id="6" name="Image 1" descr="/tmp/pcwork/api-patterns-and-practices-grpc/presentation/_shared/assets/redhat-logo-white.png">    </p:cNvPr>
           <p:cNvPicPr>
             <a:picLocks noChangeAspect="1"/>
           </p:cNvPicPr>
@@ -27705,7 +27794,7 @@
       </p:sp>
       <p:pic>
         <p:nvPicPr>
-          <p:cNvPr id="3" name="Image 0" descr="/home/rsedor/Dev/api-patterns-and-practices-grpc/presentation/_shared/assets/logo-candidate-2.png">    </p:cNvPr>
+          <p:cNvPr id="3" name="Image 0" descr="/tmp/pcwork/api-patterns-and-practices-grpc/presentation/_shared/assets/logo-candidate-2.png">    </p:cNvPr>
           <p:cNvPicPr>
             <a:picLocks noChangeAspect="1"/>
           </p:cNvPicPr>
@@ -28305,7 +28394,7 @@
       </p:sp>
       <p:pic>
         <p:nvPicPr>
-          <p:cNvPr id="3" name="Image 0" descr="/home/rsedor/Dev/api-patterns-and-practices-grpc/presentation/_shared/assets/logo-candidate-2.png">    </p:cNvPr>
+          <p:cNvPr id="3" name="Image 0" descr="/tmp/pcwork/api-patterns-and-practices-grpc/presentation/_shared/assets/logo-candidate-2.png">    </p:cNvPr>
           <p:cNvPicPr>
             <a:picLocks noChangeAspect="1"/>
           </p:cNvPicPr>
@@ -28959,7 +29048,7 @@
       </p:sp>
       <p:pic>
         <p:nvPicPr>
-          <p:cNvPr id="3" name="Image 0" descr="/home/rsedor/Dev/api-patterns-and-practices-grpc/presentation/_shared/assets/logo-candidate-2.png">    </p:cNvPr>
+          <p:cNvPr id="3" name="Image 0" descr="/tmp/pcwork/api-patterns-and-practices-grpc/presentation/_shared/assets/logo-candidate-2.png">    </p:cNvPr>
           <p:cNvPicPr>
             <a:picLocks noChangeAspect="1"/>
           </p:cNvPicPr>
@@ -29685,7 +29774,7 @@
       </p:sp>
       <p:pic>
         <p:nvPicPr>
-          <p:cNvPr id="3" name="Image 0" descr="/home/rsedor/Dev/api-patterns-and-practices-grpc/presentation/_shared/assets/logo-candidate-2.png">    </p:cNvPr>
+          <p:cNvPr id="3" name="Image 0" descr="/tmp/pcwork/api-patterns-and-practices-grpc/presentation/_shared/assets/logo-candidate-2.png">    </p:cNvPr>
           <p:cNvPicPr>
             <a:picLocks noChangeAspect="1"/>
           </p:cNvPicPr>
@@ -30357,7 +30446,7 @@
       </p:sp>
       <p:pic>
         <p:nvPicPr>
-          <p:cNvPr id="3" name="Image 0" descr="/home/rsedor/Dev/api-patterns-and-practices-grpc/presentation/_shared/assets/logo-candidate-2.png">    </p:cNvPr>
+          <p:cNvPr id="3" name="Image 0" descr="/tmp/pcwork/api-patterns-and-practices-grpc/presentation/_shared/assets/logo-candidate-2.png">    </p:cNvPr>
           <p:cNvPicPr>
             <a:picLocks noChangeAspect="1"/>
           </p:cNvPicPr>
@@ -30975,7 +31064,7 @@
       </p:sp>
       <p:pic>
         <p:nvPicPr>
-          <p:cNvPr id="3" name="Image 0" descr="/home/rsedor/Dev/api-patterns-and-practices-grpc/presentation/_shared/assets/logo-candidate-2.png">    </p:cNvPr>
+          <p:cNvPr id="3" name="Image 0" descr="/tmp/pcwork/api-patterns-and-practices-grpc/presentation/_shared/assets/logo-candidate-2.png">    </p:cNvPr>
           <p:cNvPicPr>
             <a:picLocks noChangeAspect="1"/>
           </p:cNvPicPr>
@@ -31524,6 +31613,454 @@
               <a:t>No quarkus.grpc.server.ssl.* here: on CRC, OpenShift Service Mesh's STRICT PeerAuthentication terminates mTLS in the sidecar instead.</a:t>
             </a:r>
             <a:endParaRPr lang="en-US" sz="1300" dirty="0"/>
+          </a:p>
+        </p:txBody>
+      </p:sp>
+    </p:spTree>
+  </p:cSld>
+  <p:clrMapOvr>
+    <a:masterClrMapping/>
+  </p:clrMapOvr>
+</p:sld>
+</file>
+
+<file path=ppt/slides/slide67.xml><?xml version="1.0" encoding="utf-8"?>
+<p:sld xmlns:a="http://schemas.openxmlformats.org/drawingml/2006/main" xmlns:r="http://schemas.openxmlformats.org/officeDocument/2006/relationships" xmlns:p="http://schemas.openxmlformats.org/presentationml/2006/main">
+  <p:cSld name="Slide 67">
+    <p:spTree>
+      <p:nvGrpSpPr>
+        <p:cNvPr id="1" name=""/>
+        <p:cNvGrpSpPr/>
+        <p:nvPr/>
+      </p:nvGrpSpPr>
+      <p:grpSpPr>
+        <a:xfrm>
+          <a:off x="0" y="0"/>
+          <a:ext cx="0" cy="0"/>
+          <a:chOff x="0" y="0"/>
+          <a:chExt cx="0" cy="0"/>
+        </a:xfrm>
+      </p:grpSpPr>
+      <p:sp>
+        <p:nvSpPr>
+          <p:cNvPr id="2" name="Text 0"/>
+          <p:cNvSpPr/>
+          <p:nvPr/>
+        </p:nvSpPr>
+        <p:spPr>
+          <a:xfrm>
+            <a:off x="566928" y="6364224"/>
+            <a:ext cx="914400" cy="274320"/>
+          </a:xfrm>
+          <a:prstGeom prst="rect">
+            <a:avLst/>
+          </a:prstGeom>
+          <a:noFill/>
+          <a:ln/>
+        </p:spPr>
+        <p:txBody>
+          <a:bodyPr wrap="square" rtlCol="0" anchor="ctr"/>
+          <a:lstStyle/>
+          <a:p>
+            <a:pPr algn="l" indent="0" marL="0">
+              <a:buNone/>
+            </a:pPr>
+            <a:r>
+              <a:rPr lang="en-US" sz="1000" dirty="0">
+                <a:solidFill>
+                  <a:srgbClr val="8A8A8A"/>
+                </a:solidFill>
+                <a:latin typeface="Red Hat Text" pitchFamily="34" charset="0"/>
+                <a:ea typeface="Red Hat Text" pitchFamily="34" charset="-122"/>
+                <a:cs typeface="Red Hat Text" pitchFamily="34" charset="-120"/>
+              </a:rPr>
+              <a:t>67</a:t>
+            </a:r>
+            <a:endParaRPr lang="en-US" sz="1000" dirty="0"/>
+          </a:p>
+        </p:txBody>
+      </p:sp>
+      <p:pic>
+        <p:nvPicPr>
+          <p:cNvPr id="3" name="Image 0" descr="/tmp/pcwork/api-patterns-and-practices-grpc/presentation/_shared/assets/logo-candidate-2.png">    </p:cNvPr>
+          <p:cNvPicPr>
+            <a:picLocks noChangeAspect="1"/>
+          </p:cNvPicPr>
+          <p:nvPr/>
+        </p:nvPicPr>
+        <p:blipFill>
+          <a:blip r:embed="rId1"/>
+          <a:stretch>
+            <a:fillRect/>
+          </a:stretch>
+        </p:blipFill>
+        <p:spPr>
+          <a:xfrm>
+            <a:off x="10561320" y="6355080"/>
+            <a:ext cx="1033272" cy="246888"/>
+          </a:xfrm>
+          <a:prstGeom prst="rect">
+            <a:avLst/>
+          </a:prstGeom>
+        </p:spPr>
+      </p:pic>
+      <p:sp>
+        <p:nvSpPr>
+          <p:cNvPr id="4" name="Text 1"/>
+          <p:cNvSpPr/>
+          <p:nvPr/>
+        </p:nvSpPr>
+        <p:spPr>
+          <a:xfrm>
+            <a:off x="566928" y="384048"/>
+            <a:ext cx="11055096" cy="292608"/>
+          </a:xfrm>
+          <a:prstGeom prst="rect">
+            <a:avLst/>
+          </a:prstGeom>
+          <a:noFill/>
+          <a:ln/>
+        </p:spPr>
+        <p:txBody>
+          <a:bodyPr wrap="square" rtlCol="0" anchor="ctr"/>
+          <a:lstStyle/>
+          <a:p>
+            <a:pPr algn="l" indent="0" marL="0">
+              <a:buNone/>
+            </a:pPr>
+            <a:r>
+              <a:rPr lang="en-US" sz="1200" b="1" spc="400" kern="0" dirty="0">
+                <a:solidFill>
+                  <a:srgbClr val="EE0000"/>
+                </a:solidFill>
+                <a:latin typeface="Overpass" pitchFamily="34" charset="0"/>
+                <a:ea typeface="Overpass" pitchFamily="34" charset="-122"/>
+                <a:cs typeface="Overpass" pitchFamily="34" charset="-120"/>
+              </a:rPr>
+              <a:t>SCAN TO EXPLORE</a:t>
+            </a:r>
+            <a:endParaRPr lang="en-US" sz="1200" dirty="0"/>
+          </a:p>
+        </p:txBody>
+      </p:sp>
+      <p:sp>
+        <p:nvSpPr>
+          <p:cNvPr id="5" name="Text 2"/>
+          <p:cNvSpPr/>
+          <p:nvPr/>
+        </p:nvSpPr>
+        <p:spPr>
+          <a:xfrm>
+            <a:off x="566928" y="676656"/>
+            <a:ext cx="11055096" cy="1005840"/>
+          </a:xfrm>
+          <a:prstGeom prst="rect">
+            <a:avLst/>
+          </a:prstGeom>
+          <a:noFill/>
+          <a:ln/>
+        </p:spPr>
+        <p:txBody>
+          <a:bodyPr wrap="square" rtlCol="0" anchor="t"/>
+          <a:lstStyle/>
+          <a:p>
+            <a:pPr algn="l" indent="0" marL="0">
+              <a:buNone/>
+            </a:pPr>
+            <a:r>
+              <a:rPr lang="en-US" sz="3000" b="1" dirty="0">
+                <a:solidFill>
+                  <a:srgbClr val="151515"/>
+                </a:solidFill>
+                <a:latin typeface="Overpass" pitchFamily="34" charset="0"/>
+                <a:ea typeface="Overpass" pitchFamily="34" charset="-122"/>
+                <a:cs typeface="Overpass" pitchFamily="34" charset="-120"/>
+              </a:rPr>
+              <a:t>Take it with you</a:t>
+            </a:r>
+            <a:endParaRPr lang="en-US" sz="3000" dirty="0"/>
+          </a:p>
+        </p:txBody>
+      </p:sp>
+      <p:pic>
+        <p:nvPicPr>
+          <p:cNvPr id="6" name="Image 1" descr="/tmp/pcwork/api-patterns-and-practices-grpc/presentation/_shared/assets/qr-grpc-site.png">    </p:cNvPr>
+          <p:cNvPicPr>
+            <a:picLocks noChangeAspect="1"/>
+          </p:cNvPicPr>
+          <p:nvPr/>
+        </p:nvPicPr>
+        <p:blipFill>
+          <a:blip r:embed="rId2"/>
+          <a:stretch>
+            <a:fillRect/>
+          </a:stretch>
+        </p:blipFill>
+        <p:spPr>
+          <a:xfrm>
+            <a:off x="2103120" y="1627632"/>
+            <a:ext cx="2834640" cy="2834640"/>
+          </a:xfrm>
+          <a:prstGeom prst="rect">
+            <a:avLst/>
+          </a:prstGeom>
+        </p:spPr>
+      </p:pic>
+      <p:sp>
+        <p:nvSpPr>
+          <p:cNvPr id="7" name="Text 3"/>
+          <p:cNvSpPr/>
+          <p:nvPr/>
+        </p:nvSpPr>
+        <p:spPr>
+          <a:xfrm>
+            <a:off x="1417320" y="4553712"/>
+            <a:ext cx="4206240" cy="365760"/>
+          </a:xfrm>
+          <a:prstGeom prst="rect">
+            <a:avLst/>
+          </a:prstGeom>
+          <a:noFill/>
+          <a:ln/>
+        </p:spPr>
+        <p:txBody>
+          <a:bodyPr wrap="square" rtlCol="0" anchor="ctr"/>
+          <a:lstStyle/>
+          <a:p>
+            <a:pPr algn="ctr" indent="0" marL="0">
+              <a:buNone/>
+            </a:pPr>
+            <a:r>
+              <a:rPr lang="en-US" sz="1800" b="1" dirty="0">
+                <a:solidFill>
+                  <a:srgbClr val="151515"/>
+                </a:solidFill>
+                <a:latin typeface="Overpass" pitchFamily="34" charset="0"/>
+                <a:ea typeface="Overpass" pitchFamily="34" charset="-122"/>
+                <a:cs typeface="Overpass" pitchFamily="34" charset="-120"/>
+              </a:rPr>
+              <a:t>The site</a:t>
+            </a:r>
+            <a:endParaRPr lang="en-US" sz="1800" dirty="0"/>
+          </a:p>
+        </p:txBody>
+      </p:sp>
+      <p:sp>
+        <p:nvSpPr>
+          <p:cNvPr id="8" name="Text 4"/>
+          <p:cNvSpPr/>
+          <p:nvPr/>
+        </p:nvSpPr>
+        <p:spPr>
+          <a:xfrm>
+            <a:off x="1325880" y="4937760"/>
+            <a:ext cx="4389120" cy="658368"/>
+          </a:xfrm>
+          <a:prstGeom prst="rect">
+            <a:avLst/>
+          </a:prstGeom>
+          <a:noFill/>
+          <a:ln/>
+        </p:spPr>
+        <p:txBody>
+          <a:bodyPr wrap="square" rtlCol="0" anchor="t"/>
+          <a:lstStyle/>
+          <a:p>
+            <a:pPr algn="ctr" indent="0" marL="0">
+              <a:buNone/>
+            </a:pPr>
+            <a:r>
+              <a:rPr lang="en-US" sz="1300" i="1" dirty="0">
+                <a:solidFill>
+                  <a:srgbClr val="5A5A5A"/>
+                </a:solidFill>
+                <a:latin typeface="Red Hat Text" pitchFamily="34" charset="0"/>
+                <a:ea typeface="Red Hat Text" pitchFamily="34" charset="-122"/>
+                <a:cs typeface="Red Hat Text" pitchFamily="34" charset="-120"/>
+              </a:rPr>
+              <a:t>Chapters, the Protobuf contracts, and both-stack runnable examples</a:t>
+            </a:r>
+            <a:endParaRPr lang="en-US" sz="1300" dirty="0"/>
+          </a:p>
+        </p:txBody>
+      </p:sp>
+      <p:sp>
+        <p:nvSpPr>
+          <p:cNvPr id="9" name="Text 5"/>
+          <p:cNvSpPr/>
+          <p:nvPr/>
+        </p:nvSpPr>
+        <p:spPr>
+          <a:xfrm>
+            <a:off x="1325880" y="5596128"/>
+            <a:ext cx="4389120" cy="292608"/>
+          </a:xfrm>
+          <a:prstGeom prst="rect">
+            <a:avLst/>
+          </a:prstGeom>
+          <a:noFill/>
+          <a:ln/>
+        </p:spPr>
+        <p:txBody>
+          <a:bodyPr wrap="square" rtlCol="0" anchor="ctr"/>
+          <a:lstStyle/>
+          <a:p>
+            <a:pPr algn="ctr" indent="0" marL="0">
+              <a:buNone/>
+            </a:pPr>
+            <a:r>
+              <a:rPr lang="en-US" sz="1000" dirty="0">
+                <a:solidFill>
+                  <a:srgbClr val="EE0000"/>
+                </a:solidFill>
+                <a:latin typeface="Red Hat Mono" pitchFamily="34" charset="0"/>
+                <a:ea typeface="Red Hat Mono" pitchFamily="34" charset="-122"/>
+                <a:cs typeface="Red Hat Mono" pitchFamily="34" charset="-120"/>
+              </a:rPr>
+              <a:t>patterncatalyst.github.io/api-patterns-and-practices-grpc</a:t>
+            </a:r>
+            <a:endParaRPr lang="en-US" sz="1000" dirty="0"/>
+          </a:p>
+        </p:txBody>
+      </p:sp>
+      <p:pic>
+        <p:nvPicPr>
+          <p:cNvPr id="10" name="Image 2" descr="/tmp/pcwork/api-patterns-and-practices-grpc/presentation/_shared/assets/qr-hub.png">    </p:cNvPr>
+          <p:cNvPicPr>
+            <a:picLocks noChangeAspect="1"/>
+          </p:cNvPicPr>
+          <p:nvPr/>
+        </p:nvPicPr>
+        <p:blipFill>
+          <a:blip r:embed="rId3"/>
+          <a:stretch>
+            <a:fillRect/>
+          </a:stretch>
+        </p:blipFill>
+        <p:spPr>
+          <a:xfrm>
+            <a:off x="7251192" y="1627632"/>
+            <a:ext cx="2834640" cy="2834640"/>
+          </a:xfrm>
+          <a:prstGeom prst="rect">
+            <a:avLst/>
+          </a:prstGeom>
+        </p:spPr>
+      </p:pic>
+      <p:sp>
+        <p:nvSpPr>
+          <p:cNvPr id="11" name="Text 6"/>
+          <p:cNvSpPr/>
+          <p:nvPr/>
+        </p:nvSpPr>
+        <p:spPr>
+          <a:xfrm>
+            <a:off x="6565392" y="4553712"/>
+            <a:ext cx="4206240" cy="365760"/>
+          </a:xfrm>
+          <a:prstGeom prst="rect">
+            <a:avLst/>
+          </a:prstGeom>
+          <a:noFill/>
+          <a:ln/>
+        </p:spPr>
+        <p:txBody>
+          <a:bodyPr wrap="square" rtlCol="0" anchor="ctr"/>
+          <a:lstStyle/>
+          <a:p>
+            <a:pPr algn="ctr" indent="0" marL="0">
+              <a:buNone/>
+            </a:pPr>
+            <a:r>
+              <a:rPr lang="en-US" sz="1800" b="1" dirty="0">
+                <a:solidFill>
+                  <a:srgbClr val="151515"/>
+                </a:solidFill>
+                <a:latin typeface="Overpass" pitchFamily="34" charset="0"/>
+                <a:ea typeface="Overpass" pitchFamily="34" charset="-122"/>
+                <a:cs typeface="Overpass" pitchFamily="34" charset="-120"/>
+              </a:rPr>
+              <a:t>Workshops &amp; Tutorials</a:t>
+            </a:r>
+            <a:endParaRPr lang="en-US" sz="1800" dirty="0"/>
+          </a:p>
+        </p:txBody>
+      </p:sp>
+      <p:sp>
+        <p:nvSpPr>
+          <p:cNvPr id="12" name="Text 7"/>
+          <p:cNvSpPr/>
+          <p:nvPr/>
+        </p:nvSpPr>
+        <p:spPr>
+          <a:xfrm>
+            <a:off x="6473952" y="4937760"/>
+            <a:ext cx="4389120" cy="658368"/>
+          </a:xfrm>
+          <a:prstGeom prst="rect">
+            <a:avLst/>
+          </a:prstGeom>
+          <a:noFill/>
+          <a:ln/>
+        </p:spPr>
+        <p:txBody>
+          <a:bodyPr wrap="square" rtlCol="0" anchor="t"/>
+          <a:lstStyle/>
+          <a:p>
+            <a:pPr algn="ctr" indent="0" marL="0">
+              <a:buNone/>
+            </a:pPr>
+            <a:r>
+              <a:rPr lang="en-US" sz="1300" i="1" dirty="0">
+                <a:solidFill>
+                  <a:srgbClr val="5A5A5A"/>
+                </a:solidFill>
+                <a:latin typeface="Red Hat Text" pitchFamily="34" charset="0"/>
+                <a:ea typeface="Red Hat Text" pitchFamily="34" charset="-122"/>
+                <a:cs typeface="Red Hat Text" pitchFamily="34" charset="-120"/>
+              </a:rPr>
+              <a:t>The whole series: every workshop, tutorial, and deck in one place</a:t>
+            </a:r>
+            <a:endParaRPr lang="en-US" sz="1300" dirty="0"/>
+          </a:p>
+        </p:txBody>
+      </p:sp>
+      <p:sp>
+        <p:nvSpPr>
+          <p:cNvPr id="13" name="Text 8"/>
+          <p:cNvSpPr/>
+          <p:nvPr/>
+        </p:nvSpPr>
+        <p:spPr>
+          <a:xfrm>
+            <a:off x="6473952" y="5596128"/>
+            <a:ext cx="4389120" cy="292608"/>
+          </a:xfrm>
+          <a:prstGeom prst="rect">
+            <a:avLst/>
+          </a:prstGeom>
+          <a:noFill/>
+          <a:ln/>
+        </p:spPr>
+        <p:txBody>
+          <a:bodyPr wrap="square" rtlCol="0" anchor="ctr"/>
+          <a:lstStyle/>
+          <a:p>
+            <a:pPr algn="ctr" indent="0" marL="0">
+              <a:buNone/>
+            </a:pPr>
+            <a:r>
+              <a:rPr lang="en-US" sz="900" dirty="0">
+                <a:solidFill>
+                  <a:srgbClr val="EE0000"/>
+                </a:solidFill>
+                <a:latin typeface="Red Hat Mono" pitchFamily="34" charset="0"/>
+                <a:ea typeface="Red Hat Mono" pitchFamily="34" charset="-122"/>
+                <a:cs typeface="Red Hat Mono" pitchFamily="34" charset="-120"/>
+              </a:rPr>
+              <a:t>patterncatalyst.github.io/patterncatalyst-workshops-tutorials-list</a:t>
+            </a:r>
+            <a:endParaRPr lang="en-US" sz="900" dirty="0"/>
           </a:p>
         </p:txBody>
       </p:sp>
@@ -31593,7 +32130,7 @@
       </p:sp>
       <p:pic>
         <p:nvPicPr>
-          <p:cNvPr id="3" name="Image 0" descr="/home/rsedor/Dev/api-patterns-and-practices-grpc/presentation/_shared/assets/logo-candidate-2.png">    </p:cNvPr>
+          <p:cNvPr id="3" name="Image 0" descr="/tmp/pcwork/api-patterns-and-practices-grpc/presentation/_shared/assets/logo-candidate-2.png">    </p:cNvPr>
           <p:cNvPicPr>
             <a:picLocks noChangeAspect="1"/>
           </p:cNvPicPr>
@@ -32035,7 +32572,7 @@
       </p:grpSpPr>
       <p:pic>
         <p:nvPicPr>
-          <p:cNvPr id="2" name="Image 0" descr="/home/rsedor/Dev/api-patterns-and-practices-grpc/presentation/_shared/assets/section-panel.png">    </p:cNvPr>
+          <p:cNvPr id="2" name="Image 0" descr="/tmp/pcwork/api-patterns-and-practices-grpc/presentation/_shared/assets/section-panel.png">    </p:cNvPr>
           <p:cNvPicPr>
             <a:picLocks noChangeAspect="1"/>
           </p:cNvPicPr>
@@ -32176,7 +32713,7 @@
       </p:sp>
       <p:pic>
         <p:nvPicPr>
-          <p:cNvPr id="6" name="Image 1" descr="/home/rsedor/Dev/api-patterns-and-practices-grpc/presentation/_shared/assets/redhat-logo-white.png">    </p:cNvPr>
+          <p:cNvPr id="6" name="Image 1" descr="/tmp/pcwork/api-patterns-and-practices-grpc/presentation/_shared/assets/redhat-logo-white.png">    </p:cNvPr>
           <p:cNvPicPr>
             <a:picLocks noChangeAspect="1"/>
           </p:cNvPicPr>
@@ -32264,7 +32801,7 @@
       </p:sp>
       <p:pic>
         <p:nvPicPr>
-          <p:cNvPr id="3" name="Image 0" descr="/home/rsedor/Dev/api-patterns-and-practices-grpc/presentation/_shared/assets/logo-candidate-2.png">    </p:cNvPr>
+          <p:cNvPr id="3" name="Image 0" descr="/tmp/pcwork/api-patterns-and-practices-grpc/presentation/_shared/assets/logo-candidate-2.png">    </p:cNvPr>
           <p:cNvPicPr>
             <a:picLocks noChangeAspect="1"/>
           </p:cNvPicPr>
@@ -32366,7 +32903,7 @@
       </p:sp>
       <p:pic>
         <p:nvPicPr>
-          <p:cNvPr id="6" name="Image 1" descr="/home/rsedor/Dev/api-patterns-and-practices-grpc/presentation/_shared/png/04-wellknown-catalog.png">    </p:cNvPr>
+          <p:cNvPr id="6" name="Image 1" descr="/tmp/pcwork/api-patterns-and-practices-grpc/presentation/_shared/png/04-wellknown-catalog.png">    </p:cNvPr>
           <p:cNvPicPr>
             <a:picLocks noChangeAspect="1"/>
           </p:cNvPicPr>
